--- a/data/employees/EMP054/AST-EMP054-01.pptx
+++ b/data/employees/EMP054/AST-EMP054-01.pptx
@@ -9,6 +9,7 @@
     <p:sldId id="257" r:id="rId8"/>
     <p:sldId id="258" r:id="rId9"/>
     <p:sldId id="259" r:id="rId10"/>
+    <p:sldId id="260" r:id="rId11"/>
   </p:sldIdLst>
   <p:sldSz cx="9144000" cy="6858000" type="screen4x3"/>
   <p:notesSz cx="6858000" cy="9144000"/>
@@ -3098,42 +3099,55 @@
             <a:spLocks noGrp="1"/>
           </p:cNvSpPr>
           <p:nvPr>
-            <p:ph type="ctrTitle"/>
-          </p:nvPr>
-        </p:nvSpPr>
-        <p:spPr/>
-        <p:txBody>
-          <a:bodyPr/>
-          <a:lstStyle/>
-          <a:p>
-            <a:r>
-              <a:t>Project update deck - EMP054</a:t>
-            </a:r>
-          </a:p>
-        </p:txBody>
-      </p:sp>
-      <p:sp>
-        <p:nvSpPr>
-          <p:cNvPr id="3" name="Subtitle 2"/>
-          <p:cNvSpPr>
-            <a:spLocks noGrp="1"/>
-          </p:cNvSpPr>
-          <p:nvPr>
-            <p:ph type="subTitle" idx="1"/>
-          </p:nvPr>
-        </p:nvSpPr>
-        <p:spPr/>
-        <p:txBody>
-          <a:bodyPr/>
-          <a:lstStyle/>
-          <a:p>
-            <a:r>
-              <a:t>Morgan Smith | Specialist | Operations</a:t>
-            </a:r>
-          </a:p>
-          <a:p>
-            <a:r>
-              <a:t>Prepared: 2025-02-25</a:t>
+            <p:ph type="title"/>
+          </p:nvPr>
+        </p:nvSpPr>
+        <p:spPr/>
+        <p:txBody>
+          <a:bodyPr/>
+          <a:lstStyle/>
+          <a:p>
+            <a:r>
+              <a:t>Ast Emp054 01 - EMP054</a:t>
+            </a:r>
+          </a:p>
+        </p:txBody>
+      </p:sp>
+      <p:sp>
+        <p:nvSpPr>
+          <p:cNvPr id="3" name="Content Placeholder 2"/>
+          <p:cNvSpPr>
+            <a:spLocks noGrp="1"/>
+          </p:cNvSpPr>
+          <p:nvPr>
+            <p:ph idx="1"/>
+          </p:nvPr>
+        </p:nvSpPr>
+        <p:spPr/>
+        <p:txBody>
+          <a:bodyPr/>
+          <a:lstStyle/>
+          <a:p>
+            <a:r>
+              <a:t>Slide 1: Executive Summary</a:t>
+            </a:r>
+          </a:p>
+          <a:p>
+            <a:pPr lvl="1"/>
+            <a:r>
+              <a:t>Section 1: Customer escalation analysis. EMP054 contributes to ast emp054 01 through recurring collaboration, clear ownership boundaries, and measurable outcomes. The team captures decisions, open issues, and handoffs so that knowledge remains discoverable for future programs.</a:t>
+            </a:r>
+          </a:p>
+          <a:p>
+            <a:pPr lvl="1"/>
+            <a:r>
+              <a:t>Section 2: Automation backlog refinement. EMP054 contributes to ast emp054 01 through recurring collaboration, clear ownership boundaries, and measurable outcomes. The team captures decisions, open issues, and handoffs so that knowledge remains discoverable for future programs.</a:t>
+            </a:r>
+          </a:p>
+          <a:p>
+            <a:pPr lvl="1"/>
+            <a:r>
+              <a:t>Section 3: Customer escalation analysis. EMP054 contributes to ast emp054 01 through recurring collaboration, clear ownership boundaries, and measurable outcomes. The team captures decisions, open issues, and handoffs so that knowledge remains discoverable for future programs.</a:t>
             </a:r>
           </a:p>
         </p:txBody>
@@ -3172,7 +3186,7 @@
           <a:lstStyle/>
           <a:p>
             <a:r>
-              <a:t>Shift Productivity Dashboard</a:t>
+              <a:t>Ast Emp054 01 - EMP054</a:t>
             </a:r>
           </a:p>
         </p:txBody>
@@ -3193,17 +3207,25 @@
           <a:lstStyle/>
           <a:p>
             <a:r>
-              <a:t>Overview of Shift Productivity Dashboard for Operations department.</a:t>
-            </a:r>
-          </a:p>
-          <a:p>
-            <a:r>
-              <a:t>Responsible: Morgan Smith (Specialist)</a:t>
-            </a:r>
-          </a:p>
-          <a:p>
-            <a:r>
-              <a:t>Location: Fremont | Skills: MLOps, Kusto, Python, Azure AI</a:t>
+              <a:t>Slide 2: Executive Summary</a:t>
+            </a:r>
+          </a:p>
+          <a:p>
+            <a:pPr lvl="1"/>
+            <a:r>
+              <a:t>Section 1: Customer escalation analysis. EMP054 contributes to ast emp054 01 through recurring collaboration, clear ownership boundaries, and measurable outcomes. The team captures decisions, open issues, and handoffs so that knowledge remains discoverable for future programs.</a:t>
+            </a:r>
+          </a:p>
+          <a:p>
+            <a:pPr lvl="1"/>
+            <a:r>
+              <a:t>Section 2: Data quality remediation. EMP054 contributes to ast emp054 01 through recurring collaboration, clear ownership boundaries, and measurable outcomes. The team captures decisions, open issues, and handoffs so that knowledge remains discoverable for future programs.</a:t>
+            </a:r>
+          </a:p>
+          <a:p>
+            <a:pPr lvl="1"/>
+            <a:r>
+              <a:t>Section 3: Customer escalation analysis. EMP054 contributes to ast emp054 01 through recurring collaboration, clear ownership boundaries, and measurable outcomes. The team captures decisions, open issues, and handoffs so that knowledge remains discoverable for future programs.</a:t>
             </a:r>
           </a:p>
         </p:txBody>
@@ -3242,7 +3264,7 @@
           <a:lstStyle/>
           <a:p>
             <a:r>
-              <a:t>Throughput vs. Target</a:t>
+              <a:t>Ast Emp054 01 - EMP054</a:t>
             </a:r>
           </a:p>
         </p:txBody>
@@ -3263,17 +3285,25 @@
           <a:lstStyle/>
           <a:p>
             <a:r>
-              <a:t>Overview of Throughput vs. Target for Operations department.</a:t>
-            </a:r>
-          </a:p>
-          <a:p>
-            <a:r>
-              <a:t>Responsible: Morgan Smith (Specialist)</a:t>
-            </a:r>
-          </a:p>
-          <a:p>
-            <a:r>
-              <a:t>Location: Fremont | Skills: MLOps, Kusto, Python, Azure AI</a:t>
+              <a:t>Slide 3: Executive Summary</a:t>
+            </a:r>
+          </a:p>
+          <a:p>
+            <a:pPr lvl="1"/>
+            <a:r>
+              <a:t>Section 1: Customer escalation analysis. EMP054 contributes to ast emp054 01 through recurring collaboration, clear ownership boundaries, and measurable outcomes. The team captures decisions, open issues, and handoffs so that knowledge remains discoverable for future programs.</a:t>
+            </a:r>
+          </a:p>
+          <a:p>
+            <a:pPr lvl="1"/>
+            <a:r>
+              <a:t>Section 2: Data quality remediation. EMP054 contributes to ast emp054 01 through recurring collaboration, clear ownership boundaries, and measurable outcomes. The team captures decisions, open issues, and handoffs so that knowledge remains discoverable for future programs.</a:t>
+            </a:r>
+          </a:p>
+          <a:p>
+            <a:pPr lvl="1"/>
+            <a:r>
+              <a:t>Section 3: Operational risk review. EMP054 contributes to ast emp054 01 through recurring collaboration, clear ownership boundaries, and measurable outcomes. The team captures decisions, open issues, and handoffs so that knowledge remains discoverable for future programs.</a:t>
             </a:r>
           </a:p>
         </p:txBody>
@@ -3312,7 +3342,7 @@
           <a:lstStyle/>
           <a:p>
             <a:r>
-              <a:t>Incident Response Metrics</a:t>
+              <a:t>Ast Emp054 01 - EMP054</a:t>
             </a:r>
           </a:p>
         </p:txBody>
@@ -3333,17 +3363,103 @@
           <a:lstStyle/>
           <a:p>
             <a:r>
-              <a:t>Overview of Incident Response Metrics for Operations department.</a:t>
-            </a:r>
-          </a:p>
-          <a:p>
-            <a:r>
-              <a:t>Responsible: Morgan Smith (Specialist)</a:t>
-            </a:r>
-          </a:p>
-          <a:p>
-            <a:r>
-              <a:t>Location: Fremont | Skills: MLOps, Kusto, Python, Azure AI</a:t>
+              <a:t>Slide 4: Executive Summary</a:t>
+            </a:r>
+          </a:p>
+          <a:p>
+            <a:pPr lvl="1"/>
+            <a:r>
+              <a:t>Section 1: Customer escalation analysis. EMP054 contributes to ast emp054 01 through recurring collaboration, clear ownership boundaries, and measurable outcomes. The team captures decisions, open issues, and handoffs so that knowledge remains discoverable for future programs.</a:t>
+            </a:r>
+          </a:p>
+          <a:p>
+            <a:pPr lvl="1"/>
+            <a:r>
+              <a:t>Section 2: Customer escalation analysis. EMP054 contributes to ast emp054 01 through recurring collaboration, clear ownership boundaries, and measurable outcomes. The team captures decisions, open issues, and handoffs so that knowledge remains discoverable for future programs.</a:t>
+            </a:r>
+          </a:p>
+          <a:p>
+            <a:pPr lvl="1"/>
+            <a:r>
+              <a:t>Section 3: Fabric semantic model planning. EMP054 contributes to ast emp054 01 through recurring collaboration, clear ownership boundaries, and measurable outcomes. The team captures decisions, open issues, and handoffs so that knowledge remains discoverable for future programs.</a:t>
+            </a:r>
+          </a:p>
+        </p:txBody>
+      </p:sp>
+    </p:spTree>
+  </p:cSld>
+  <p:clrMapOvr>
+    <a:masterClrMapping/>
+  </p:clrMapOvr>
+</p:sld>
+</file>
+
+<file path=ppt/slides/slide5.xml><?xml version="1.0" encoding="utf-8"?>
+<p:sld xmlns:a="http://schemas.openxmlformats.org/drawingml/2006/main" xmlns:p="http://schemas.openxmlformats.org/presentationml/2006/main" xmlns:r="http://schemas.openxmlformats.org/officeDocument/2006/relationships">
+  <p:cSld>
+    <p:spTree>
+      <p:nvGrpSpPr>
+        <p:cNvPr id="1" name=""/>
+        <p:cNvGrpSpPr/>
+        <p:nvPr/>
+      </p:nvGrpSpPr>
+      <p:grpSpPr/>
+      <p:sp>
+        <p:nvSpPr>
+          <p:cNvPr id="2" name="Title 1"/>
+          <p:cNvSpPr>
+            <a:spLocks noGrp="1"/>
+          </p:cNvSpPr>
+          <p:nvPr>
+            <p:ph type="title"/>
+          </p:nvPr>
+        </p:nvSpPr>
+        <p:spPr/>
+        <p:txBody>
+          <a:bodyPr/>
+          <a:lstStyle/>
+          <a:p>
+            <a:r>
+              <a:t>Ast Emp054 01 - EMP054</a:t>
+            </a:r>
+          </a:p>
+        </p:txBody>
+      </p:sp>
+      <p:sp>
+        <p:nvSpPr>
+          <p:cNvPr id="3" name="Content Placeholder 2"/>
+          <p:cNvSpPr>
+            <a:spLocks noGrp="1"/>
+          </p:cNvSpPr>
+          <p:nvPr>
+            <p:ph idx="1"/>
+          </p:nvPr>
+        </p:nvSpPr>
+        <p:spPr/>
+        <p:txBody>
+          <a:bodyPr/>
+          <a:lstStyle/>
+          <a:p>
+            <a:r>
+              <a:t>Slide 5: Executive Summary</a:t>
+            </a:r>
+          </a:p>
+          <a:p>
+            <a:pPr lvl="1"/>
+            <a:r>
+              <a:t>Section 1: Customer escalation analysis. EMP054 contributes to ast emp054 01 through recurring collaboration, clear ownership boundaries, and measurable outcomes. The team captures decisions, open issues, and handoffs so that knowledge remains discoverable for future programs.</a:t>
+            </a:r>
+          </a:p>
+          <a:p>
+            <a:pPr lvl="1"/>
+            <a:r>
+              <a:t>Section 2: Data quality remediation. EMP054 contributes to ast emp054 01 through recurring collaboration, clear ownership boundaries, and measurable outcomes. The team captures decisions, open issues, and handoffs so that knowledge remains discoverable for future programs.</a:t>
+            </a:r>
+          </a:p>
+          <a:p>
+            <a:pPr lvl="1"/>
+            <a:r>
+              <a:t>Section 3: Knowledge transfer and onboarding. EMP054 contributes to ast emp054 01 through recurring collaboration, clear ownership boundaries, and measurable outcomes. The team captures decisions, open issues, and handoffs so that knowledge remains discoverable for future programs.</a:t>
             </a:r>
           </a:p>
         </p:txBody>
